--- a/web/static/files/ICAS-slide-template.pptx
+++ b/web/static/files/ICAS-slide-template.pptx
@@ -3889,7 +3889,7 @@
                 </a:solidFill>
                 <a:latin typeface="Arial"/>
               </a:rPr>
-              <a:t>ICAS 2027 · International Conference on Autonomous System</a:t>
+              <a:t>ICAS 2027 · International Conference on Autonomous Systems</a:t>
             </a:r>
           </a:p>
         </p:txBody>
@@ -4009,7 +4009,7 @@
                 </a:solidFill>
                 <a:latin typeface="Arial"/>
               </a:rPr>
-              <a:t>ICAS 2027 · International Conference on Autonomous System</a:t>
+              <a:t>ICAS 2027 · International Conference on Autonomous Systems</a:t>
             </a:r>
           </a:p>
         </p:txBody>
@@ -4296,7 +4296,7 @@
                 </a:solidFill>
                 <a:latin typeface="Arial"/>
               </a:rPr>
-              <a:t>ICAS 2027 · International Conference on Autonomous System</a:t>
+              <a:t>ICAS 2027 · International Conference on Autonomous Systems</a:t>
             </a:r>
           </a:p>
         </p:txBody>
@@ -4576,7 +4576,7 @@
                 </a:solidFill>
                 <a:latin typeface="Arial"/>
               </a:rPr>
-              <a:t>ICAS 2027 · International Conference on Autonomous System</a:t>
+              <a:t>ICAS 2027 · International Conference on Autonomous Systems</a:t>
             </a:r>
           </a:p>
         </p:txBody>
